--- a/swr_matlab_param_compare/exports_channel_kinematics/paper_compare_PC_PVBC_targeted_kinematics.pptx
+++ b/swr_matlab_param_compare/exports_channel_kinematics/paper_compare_PC_PVBC_targeted_kinematics.pptx
@@ -1,6 +1,6 @@
 
 <file path=ppt/presentation.xml><?xml version="1.0" encoding="utf-8"?>
-<p:presentation xmlns:a="http://schemas.openxmlformats.org/drawingml/2006/main" xmlns:r="http://schemas.openxmlformats.org/officeDocument/2006/relationships" xmlns:p="http://schemas.openxmlformats.org/presentationml/2006/main" saveSubsetFonts="1">
+<p:presentation xmlns:a="http://schemas.openxmlformats.org/drawingml/2006/main" xmlns:r="http://schemas.openxmlformats.org/officeDocument/2006/relationships" xmlns:p="http://schemas.openxmlformats.org/presentationml/2006/main" removePersonalInfoOnSave="1" saveSubsetFonts="1">
   <p:sldMasterIdLst>
     <p:sldMasterId id="2147483648" r:id="rId1"/>
   </p:sldMasterIdLst>
@@ -3865,14 +3865,15 @@
               </a:ext>
             </a:extLst>
           </a:blip>
+          <a:srcRect r="33493"/>
           <a:stretch>
             <a:fillRect/>
           </a:stretch>
         </p:blipFill>
         <p:spPr>
           <a:xfrm>
-            <a:off x="838200" y="2441101"/>
-            <a:ext cx="10515600" cy="3120384"/>
+            <a:off x="2039631" y="2190973"/>
+            <a:ext cx="6993657" cy="3120384"/>
           </a:xfrm>
           <a:prstGeom prst="rect">
             <a:avLst/>

--- a/swr_matlab_param_compare/exports_channel_kinematics/paper_compare_PC_PVBC_targeted_kinematics.pptx
+++ b/swr_matlab_param_compare/exports_channel_kinematics/paper_compare_PC_PVBC_targeted_kinematics.pptx
@@ -1,23 +1,24 @@
 
 <file path=ppt/presentation.xml><?xml version="1.0" encoding="utf-8"?>
-<p:presentation xmlns:a="http://schemas.openxmlformats.org/drawingml/2006/main" xmlns:r="http://schemas.openxmlformats.org/officeDocument/2006/relationships" xmlns:p="http://schemas.openxmlformats.org/presentationml/2006/main" removePersonalInfoOnSave="1" saveSubsetFonts="1">
+<p:presentation xmlns:a="http://schemas.openxmlformats.org/drawingml/2006/main" xmlns:p="http://schemas.openxmlformats.org/presentationml/2006/main" xmlns:r="http://schemas.openxmlformats.org/officeDocument/2006/relationships" removePersonalInfoOnSave="1" saveSubsetFonts="1">
   <p:sldMasterIdLst>
     <p:sldMasterId id="2147483648" r:id="rId1"/>
   </p:sldMasterIdLst>
   <p:sldIdLst>
-    <p:sldId id="256" r:id="rId2"/>
-    <p:sldId id="257" r:id="rId3"/>
-    <p:sldId id="258" r:id="rId4"/>
-    <p:sldId id="259" r:id="rId5"/>
-    <p:sldId id="260" r:id="rId6"/>
-    <p:sldId id="261" r:id="rId7"/>
-    <p:sldId id="262" r:id="rId8"/>
-    <p:sldId id="263" r:id="rId9"/>
-    <p:sldId id="264" r:id="rId10"/>
-    <p:sldId id="265" r:id="rId11"/>
-    <p:sldId id="266" r:id="rId12"/>
-    <p:sldId id="267" r:id="rId13"/>
-    <p:sldId id="268" r:id="rId14"/>
+    <p:sldId id="256" r:id="rId6"/>
+    <p:sldId id="257" r:id="rId7"/>
+    <p:sldId id="258" r:id="rId8"/>
+    <p:sldId id="259" r:id="rId9"/>
+    <p:sldId id="260" r:id="rId10"/>
+    <p:sldId id="261" r:id="rId11"/>
+    <p:sldId id="262" r:id="rId12"/>
+    <p:sldId id="263" r:id="rId13"/>
+    <p:sldId id="264" r:id="rId14"/>
+    <p:sldId id="265" r:id="rId15"/>
+    <p:sldId id="266" r:id="rId16"/>
+    <p:sldId id="267" r:id="rId17"/>
+    <p:sldId id="268" r:id="rId18"/>
+    <p:sldId id="269" r:id="rId19"/>
   </p:sldIdLst>
   <p:sldSz cx="12192000" cy="6858000"/>
   <p:notesSz cx="6858000" cy="9144000"/>
@@ -25,8 +26,8 @@
     <a:defPPr>
       <a:defRPr lang="en-US"/>
     </a:defPPr>
-    <a:lvl1pPr marL="0" algn="l" defTabSz="914400" rtl="0" eaLnBrk="1" latinLnBrk="0" hangingPunct="1">
-      <a:defRPr sz="1800" kern="1200">
+    <a:lvl1pPr algn="l" defTabSz="914400" eaLnBrk="1" hangingPunct="1" latinLnBrk="0" marL="0" rtl="0">
+      <a:defRPr kern="1200" sz="1800">
         <a:solidFill>
           <a:schemeClr val="tx1"/>
         </a:solidFill>
@@ -35,8 +36,8 @@
         <a:cs typeface="+mn-cs"/>
       </a:defRPr>
     </a:lvl1pPr>
-    <a:lvl2pPr marL="457200" algn="l" defTabSz="914400" rtl="0" eaLnBrk="1" latinLnBrk="0" hangingPunct="1">
-      <a:defRPr sz="1800" kern="1200">
+    <a:lvl2pPr algn="l" defTabSz="914400" eaLnBrk="1" hangingPunct="1" latinLnBrk="0" marL="457200" rtl="0">
+      <a:defRPr kern="1200" sz="1800">
         <a:solidFill>
           <a:schemeClr val="tx1"/>
         </a:solidFill>
@@ -45,8 +46,8 @@
         <a:cs typeface="+mn-cs"/>
       </a:defRPr>
     </a:lvl2pPr>
-    <a:lvl3pPr marL="914400" algn="l" defTabSz="914400" rtl="0" eaLnBrk="1" latinLnBrk="0" hangingPunct="1">
-      <a:defRPr sz="1800" kern="1200">
+    <a:lvl3pPr algn="l" defTabSz="914400" eaLnBrk="1" hangingPunct="1" latinLnBrk="0" marL="914400" rtl="0">
+      <a:defRPr kern="1200" sz="1800">
         <a:solidFill>
           <a:schemeClr val="tx1"/>
         </a:solidFill>
@@ -55,8 +56,8 @@
         <a:cs typeface="+mn-cs"/>
       </a:defRPr>
     </a:lvl3pPr>
-    <a:lvl4pPr marL="1371600" algn="l" defTabSz="914400" rtl="0" eaLnBrk="1" latinLnBrk="0" hangingPunct="1">
-      <a:defRPr sz="1800" kern="1200">
+    <a:lvl4pPr algn="l" defTabSz="914400" eaLnBrk="1" hangingPunct="1" latinLnBrk="0" marL="1371600" rtl="0">
+      <a:defRPr kern="1200" sz="1800">
         <a:solidFill>
           <a:schemeClr val="tx1"/>
         </a:solidFill>
@@ -65,8 +66,8 @@
         <a:cs typeface="+mn-cs"/>
       </a:defRPr>
     </a:lvl4pPr>
-    <a:lvl5pPr marL="1828800" algn="l" defTabSz="914400" rtl="0" eaLnBrk="1" latinLnBrk="0" hangingPunct="1">
-      <a:defRPr sz="1800" kern="1200">
+    <a:lvl5pPr algn="l" defTabSz="914400" eaLnBrk="1" hangingPunct="1" latinLnBrk="0" marL="1828800" rtl="0">
+      <a:defRPr kern="1200" sz="1800">
         <a:solidFill>
           <a:schemeClr val="tx1"/>
         </a:solidFill>
@@ -75,8 +76,8 @@
         <a:cs typeface="+mn-cs"/>
       </a:defRPr>
     </a:lvl5pPr>
-    <a:lvl6pPr marL="2286000" algn="l" defTabSz="914400" rtl="0" eaLnBrk="1" latinLnBrk="0" hangingPunct="1">
-      <a:defRPr sz="1800" kern="1200">
+    <a:lvl6pPr algn="l" defTabSz="914400" eaLnBrk="1" hangingPunct="1" latinLnBrk="0" marL="2286000" rtl="0">
+      <a:defRPr kern="1200" sz="1800">
         <a:solidFill>
           <a:schemeClr val="tx1"/>
         </a:solidFill>
@@ -85,8 +86,8 @@
         <a:cs typeface="+mn-cs"/>
       </a:defRPr>
     </a:lvl6pPr>
-    <a:lvl7pPr marL="2743200" algn="l" defTabSz="914400" rtl="0" eaLnBrk="1" latinLnBrk="0" hangingPunct="1">
-      <a:defRPr sz="1800" kern="1200">
+    <a:lvl7pPr algn="l" defTabSz="914400" eaLnBrk="1" hangingPunct="1" latinLnBrk="0" marL="2743200" rtl="0">
+      <a:defRPr kern="1200" sz="1800">
         <a:solidFill>
           <a:schemeClr val="tx1"/>
         </a:solidFill>
@@ -95,8 +96,8 @@
         <a:cs typeface="+mn-cs"/>
       </a:defRPr>
     </a:lvl7pPr>
-    <a:lvl8pPr marL="3200400" algn="l" defTabSz="914400" rtl="0" eaLnBrk="1" latinLnBrk="0" hangingPunct="1">
-      <a:defRPr sz="1800" kern="1200">
+    <a:lvl8pPr algn="l" defTabSz="914400" eaLnBrk="1" hangingPunct="1" latinLnBrk="0" marL="3200400" rtl="0">
+      <a:defRPr kern="1200" sz="1800">
         <a:solidFill>
           <a:schemeClr val="tx1"/>
         </a:solidFill>
@@ -105,8 +106,8 @@
         <a:cs typeface="+mn-cs"/>
       </a:defRPr>
     </a:lvl8pPr>
-    <a:lvl9pPr marL="3657600" algn="l" defTabSz="914400" rtl="0" eaLnBrk="1" latinLnBrk="0" hangingPunct="1">
-      <a:defRPr sz="1800" kern="1200">
+    <a:lvl9pPr algn="l" defTabSz="914400" eaLnBrk="1" hangingPunct="1" latinLnBrk="0" marL="3657600" rtl="0">
+      <a:defRPr kern="1200" sz="1800">
         <a:solidFill>
           <a:schemeClr val="tx1"/>
         </a:solidFill>
@@ -253,7 +254,7 @@
           <a:p>
             <a:fld id="{5C2C3F0B-2B7F-4782-B315-33E516447C25}" type="datetimeFigureOut">
               <a:rPr lang="en-US" smtClean="0"/>
-              <a:t>3/2/2026</a:t>
+              <a:t>3/21/2019</a:t>
             </a:fld>
             <a:endParaRPr lang="en-US"/>
           </a:p>
@@ -421,7 +422,7 @@
           <a:p>
             <a:fld id="{5C2C3F0B-2B7F-4782-B315-33E516447C25}" type="datetimeFigureOut">
               <a:rPr lang="en-US" smtClean="0"/>
-              <a:t>3/2/2026</a:t>
+              <a:t>3/21/2019</a:t>
             </a:fld>
             <a:endParaRPr lang="en-US"/>
           </a:p>
@@ -599,7 +600,7 @@
           <a:p>
             <a:fld id="{5C2C3F0B-2B7F-4782-B315-33E516447C25}" type="datetimeFigureOut">
               <a:rPr lang="en-US" smtClean="0"/>
-              <a:t>3/2/2026</a:t>
+              <a:t>3/21/2019</a:t>
             </a:fld>
             <a:endParaRPr lang="en-US"/>
           </a:p>
@@ -735,7 +736,7 @@
           <a:p>
             <a:fld id="{5C2C3F0B-2B7F-4782-B315-33E516447C25}" type="datetimeFigureOut">
               <a:rPr lang="en-US" smtClean="0"/>
-              <a:t>3/2/2026</a:t>
+              <a:t>3/21/2019</a:t>
             </a:fld>
             <a:endParaRPr lang="en-US"/>
           </a:p>
@@ -852,7 +853,7 @@
           <a:p>
             <a:fld id="{5C2C3F0B-2B7F-4782-B315-33E516447C25}" type="datetimeFigureOut">
               <a:rPr lang="en-US" smtClean="0"/>
-              <a:t>3/2/2026</a:t>
+              <a:t>3/21/2019</a:t>
             </a:fld>
             <a:endParaRPr lang="en-US"/>
           </a:p>
@@ -1039,7 +1040,7 @@
           <a:p>
             <a:fld id="{5C2C3F0B-2B7F-4782-B315-33E516447C25}" type="datetimeFigureOut">
               <a:rPr lang="en-US" smtClean="0"/>
-              <a:t>3/2/2026</a:t>
+              <a:t>3/21/2019</a:t>
             </a:fld>
             <a:endParaRPr lang="en-US"/>
           </a:p>
@@ -1284,7 +1285,7 @@
           <a:p>
             <a:fld id="{5C2C3F0B-2B7F-4782-B315-33E516447C25}" type="datetimeFigureOut">
               <a:rPr lang="en-US" smtClean="0"/>
-              <a:t>3/2/2026</a:t>
+              <a:t>3/21/2019</a:t>
             </a:fld>
             <a:endParaRPr lang="en-US"/>
           </a:p>
@@ -1513,7 +1514,7 @@
           <a:p>
             <a:fld id="{5C2C3F0B-2B7F-4782-B315-33E516447C25}" type="datetimeFigureOut">
               <a:rPr lang="en-US" smtClean="0"/>
-              <a:t>3/2/2026</a:t>
+              <a:t>3/21/2019</a:t>
             </a:fld>
             <a:endParaRPr lang="en-US"/>
           </a:p>
@@ -1877,7 +1878,7 @@
           <a:p>
             <a:fld id="{5C2C3F0B-2B7F-4782-B315-33E516447C25}" type="datetimeFigureOut">
               <a:rPr lang="en-US" smtClean="0"/>
-              <a:t>3/2/2026</a:t>
+              <a:t>3/21/2019</a:t>
             </a:fld>
             <a:endParaRPr lang="en-US"/>
           </a:p>
@@ -1994,7 +1995,7 @@
           <a:p>
             <a:fld id="{5C2C3F0B-2B7F-4782-B315-33E516447C25}" type="datetimeFigureOut">
               <a:rPr lang="en-US" smtClean="0"/>
-              <a:t>3/2/2026</a:t>
+              <a:t>3/21/2019</a:t>
             </a:fld>
             <a:endParaRPr lang="en-US"/>
           </a:p>
@@ -2089,7 +2090,7 @@
           <a:p>
             <a:fld id="{5C2C3F0B-2B7F-4782-B315-33E516447C25}" type="datetimeFigureOut">
               <a:rPr lang="en-US" smtClean="0"/>
-              <a:t>3/2/2026</a:t>
+              <a:t>3/21/2019</a:t>
             </a:fld>
             <a:endParaRPr lang="en-US"/>
           </a:p>
@@ -2364,7 +2365,7 @@
           <a:p>
             <a:fld id="{5C2C3F0B-2B7F-4782-B315-33E516447C25}" type="datetimeFigureOut">
               <a:rPr lang="en-US" smtClean="0"/>
-              <a:t>3/2/2026</a:t>
+              <a:t>3/21/2019</a:t>
             </a:fld>
             <a:endParaRPr lang="en-US"/>
           </a:p>
@@ -2616,7 +2617,7 @@
           <a:p>
             <a:fld id="{5C2C3F0B-2B7F-4782-B315-33E516447C25}" type="datetimeFigureOut">
               <a:rPr lang="en-US" smtClean="0"/>
-              <a:t>3/2/2026</a:t>
+              <a:t>3/21/2019</a:t>
             </a:fld>
             <a:endParaRPr lang="en-US"/>
           </a:p>
@@ -2827,7 +2828,7 @@
           <a:p>
             <a:fld id="{5C2C3F0B-2B7F-4782-B315-33E516447C25}" type="datetimeFigureOut">
               <a:rPr lang="en-US" smtClean="0"/>
-              <a:t>3/2/2026</a:t>
+              <a:t>3/21/2019</a:t>
             </a:fld>
             <a:endParaRPr lang="en-US"/>
           </a:p>
@@ -3218,8 +3219,8 @@
 </file>
 
 <file path=ppt/slides/slide1.xml><?xml version="1.0" encoding="utf-8"?>
-<p:sld xmlns:a="http://schemas.openxmlformats.org/drawingml/2006/main" xmlns:r="http://schemas.openxmlformats.org/officeDocument/2006/relationships" xmlns:p="http://schemas.openxmlformats.org/presentationml/2006/main">
-  <p:cSld>
+<p:sld xmlns:a="http://schemas.openxmlformats.org/drawingml/2006/main" xmlns:p="http://schemas.openxmlformats.org/presentationml/2006/main" xmlns:r="http://schemas.openxmlformats.org/officeDocument/2006/relationships">
+  <p:cSld name="">
     <p:spTree>
       <p:nvGrpSpPr>
         <p:cNvPr id="1" name=""/>
@@ -3259,14 +3260,14 @@
         <p:nvPicPr>
           <p:cNvPr id="3" name="Content"/>
           <p:cNvPicPr>
-            <a:picLocks noGrp="1" noChangeAspect="1"/>
+            <a:picLocks noChangeAspect="1" noGrp="1"/>
           </p:cNvPicPr>
           <p:nvPr>
             <p:ph idx="1"/>
           </p:nvPr>
         </p:nvPicPr>
         <p:blipFill>
-          <a:blip r:embed="rId2" cstate="print">
+          <a:blip r:embed="rId2">
             <a:extLst>
               <a:ext uri="{28A0092B-C50C-407E-A947-70E740481C1C}">
                 <a14:useLocalDpi xmlns:a14="http://schemas.microsoft.com/office/drawing/2010/main" val="0"/>
@@ -3279,12 +3280,10 @@
         </p:blipFill>
         <p:spPr>
           <a:xfrm>
-            <a:off x="2432534" y="1825625"/>
-            <a:ext cx="7326931" cy="4351338"/>
+            <a:off x="2365828" y="1825625"/>
+            <a:ext cx="7460342" cy="4351338"/>
           </a:xfrm>
-          <a:prstGeom prst="rect">
-            <a:avLst/>
-          </a:prstGeom>
+          <a:prstGeom prst="rect"/>
         </p:spPr>
       </p:pic>
       <p:sp>
@@ -3294,7 +3293,7 @@
             <a:spLocks noGrp="1"/>
           </p:cNvSpPr>
           <p:nvPr>
-            <p:ph type="dt" sz="half" idx="10"/>
+            <p:ph idx="10" sz="half" type="dt"/>
           </p:nvPr>
         </p:nvSpPr>
         <p:spPr/>
@@ -3304,7 +3303,7 @@
           <a:p>
             <a:fld id="{5C2C3F0B-2B7F-4782-B315-33E516447C25}" type="datetimeFigureOut">
               <a:rPr lang="en-US" smtClean="0"/>
-              <a:t>3/2/2026</a:t>
+              <a:t>3/21/2019</a:t>
             </a:fld>
             <a:endParaRPr lang="en-US"/>
           </a:p>
@@ -3317,7 +3316,7 @@
             <a:spLocks noGrp="1"/>
           </p:cNvSpPr>
           <p:nvPr>
-            <p:ph type="ftr" sz="quarter" idx="11"/>
+            <p:ph idx="11" sz="quarter" type="ftr"/>
           </p:nvPr>
         </p:nvSpPr>
         <p:spPr/>
@@ -3336,7 +3335,7 @@
             <a:spLocks noGrp="1"/>
           </p:cNvSpPr>
           <p:nvPr>
-            <p:ph type="sldNum" sz="quarter" idx="12"/>
+            <p:ph idx="12" sz="quarter" type="sldNum"/>
           </p:nvPr>
         </p:nvSpPr>
         <p:spPr/>
@@ -3346,7 +3345,7 @@
           <a:p>
             <a:fld id="{6FACB95C-998B-4B89-BDB5-3B69D78FCBB4}" type="slidenum">
               <a:rPr lang="en-US" smtClean="0"/>
-              <a:t>1</a:t>
+              <a:t>‹#›</a:t>
             </a:fld>
             <a:endParaRPr lang="en-US"/>
           </a:p>
@@ -3359,15 +3358,12 @@
       </p:ext>
     </p:extLst>
   </p:cSld>
-  <p:clrMapOvr>
-    <a:masterClrMapping/>
-  </p:clrMapOvr>
 </p:sld>
 </file>
 
 <file path=ppt/slides/slide10.xml><?xml version="1.0" encoding="utf-8"?>
-<p:sld xmlns:a="http://schemas.openxmlformats.org/drawingml/2006/main" xmlns:r="http://schemas.openxmlformats.org/officeDocument/2006/relationships" xmlns:p="http://schemas.openxmlformats.org/presentationml/2006/main">
-  <p:cSld>
+<p:sld xmlns:a="http://schemas.openxmlformats.org/drawingml/2006/main" xmlns:p="http://schemas.openxmlformats.org/presentationml/2006/main" xmlns:r="http://schemas.openxmlformats.org/officeDocument/2006/relationships">
+  <p:cSld name="">
     <p:spTree>
       <p:nvGrpSpPr>
         <p:cNvPr id="1" name=""/>
@@ -3407,14 +3403,14 @@
         <p:nvPicPr>
           <p:cNvPr id="3" name="Content"/>
           <p:cNvPicPr>
-            <a:picLocks noGrp="1" noChangeAspect="1"/>
+            <a:picLocks noChangeAspect="1" noGrp="1"/>
           </p:cNvPicPr>
           <p:nvPr>
             <p:ph idx="1"/>
           </p:nvPr>
         </p:nvPicPr>
         <p:blipFill>
-          <a:blip r:embed="rId2" cstate="print">
+          <a:blip r:embed="rId2">
             <a:extLst>
               <a:ext uri="{28A0092B-C50C-407E-A947-70E740481C1C}">
                 <a14:useLocalDpi xmlns:a14="http://schemas.microsoft.com/office/drawing/2010/main" val="0"/>
@@ -3427,12 +3423,10 @@
         </p:blipFill>
         <p:spPr>
           <a:xfrm>
-            <a:off x="2582893" y="1825625"/>
-            <a:ext cx="7026213" cy="4351338"/>
+            <a:off x="2513757" y="1825625"/>
+            <a:ext cx="7164484" cy="4351338"/>
           </a:xfrm>
-          <a:prstGeom prst="rect">
-            <a:avLst/>
-          </a:prstGeom>
+          <a:prstGeom prst="rect"/>
         </p:spPr>
       </p:pic>
       <p:sp>
@@ -3442,7 +3436,7 @@
             <a:spLocks noGrp="1"/>
           </p:cNvSpPr>
           <p:nvPr>
-            <p:ph type="dt" sz="half" idx="10"/>
+            <p:ph idx="10" sz="half" type="dt"/>
           </p:nvPr>
         </p:nvSpPr>
         <p:spPr/>
@@ -3452,7 +3446,7 @@
           <a:p>
             <a:fld id="{5C2C3F0B-2B7F-4782-B315-33E516447C25}" type="datetimeFigureOut">
               <a:rPr lang="en-US" smtClean="0"/>
-              <a:t>3/2/2026</a:t>
+              <a:t>3/21/2019</a:t>
             </a:fld>
             <a:endParaRPr lang="en-US"/>
           </a:p>
@@ -3465,7 +3459,7 @@
             <a:spLocks noGrp="1"/>
           </p:cNvSpPr>
           <p:nvPr>
-            <p:ph type="ftr" sz="quarter" idx="11"/>
+            <p:ph idx="11" sz="quarter" type="ftr"/>
           </p:nvPr>
         </p:nvSpPr>
         <p:spPr/>
@@ -3484,7 +3478,7 @@
             <a:spLocks noGrp="1"/>
           </p:cNvSpPr>
           <p:nvPr>
-            <p:ph type="sldNum" sz="quarter" idx="12"/>
+            <p:ph idx="12" sz="quarter" type="sldNum"/>
           </p:nvPr>
         </p:nvSpPr>
         <p:spPr/>
@@ -3494,7 +3488,7 @@
           <a:p>
             <a:fld id="{6FACB95C-998B-4B89-BDB5-3B69D78FCBB4}" type="slidenum">
               <a:rPr lang="en-US" smtClean="0"/>
-              <a:t>10</a:t>
+              <a:t>‹#›</a:t>
             </a:fld>
             <a:endParaRPr lang="en-US"/>
           </a:p>
@@ -3507,15 +3501,12 @@
       </p:ext>
     </p:extLst>
   </p:cSld>
-  <p:clrMapOvr>
-    <a:masterClrMapping/>
-  </p:clrMapOvr>
 </p:sld>
 </file>
 
 <file path=ppt/slides/slide11.xml><?xml version="1.0" encoding="utf-8"?>
-<p:sld xmlns:a="http://schemas.openxmlformats.org/drawingml/2006/main" xmlns:r="http://schemas.openxmlformats.org/officeDocument/2006/relationships" xmlns:p="http://schemas.openxmlformats.org/presentationml/2006/main">
-  <p:cSld>
+<p:sld xmlns:a="http://schemas.openxmlformats.org/drawingml/2006/main" xmlns:p="http://schemas.openxmlformats.org/presentationml/2006/main" xmlns:r="http://schemas.openxmlformats.org/officeDocument/2006/relationships">
+  <p:cSld name="">
     <p:spTree>
       <p:nvGrpSpPr>
         <p:cNvPr id="1" name=""/>
@@ -3555,14 +3546,14 @@
         <p:nvPicPr>
           <p:cNvPr id="3" name="Content"/>
           <p:cNvPicPr>
-            <a:picLocks noGrp="1" noChangeAspect="1"/>
+            <a:picLocks noChangeAspect="1" noGrp="1"/>
           </p:cNvPicPr>
           <p:nvPr>
             <p:ph idx="1"/>
           </p:nvPr>
         </p:nvPicPr>
         <p:blipFill>
-          <a:blip r:embed="rId2" cstate="print">
+          <a:blip r:embed="rId2">
             <a:extLst>
               <a:ext uri="{28A0092B-C50C-407E-A947-70E740481C1C}">
                 <a14:useLocalDpi xmlns:a14="http://schemas.microsoft.com/office/drawing/2010/main" val="0"/>
@@ -3575,12 +3566,10 @@
         </p:blipFill>
         <p:spPr>
           <a:xfrm>
-            <a:off x="2592224" y="1825625"/>
-            <a:ext cx="7007551" cy="4351338"/>
+            <a:off x="2525874" y="1825625"/>
+            <a:ext cx="7140250" cy="4351338"/>
           </a:xfrm>
-          <a:prstGeom prst="rect">
-            <a:avLst/>
-          </a:prstGeom>
+          <a:prstGeom prst="rect"/>
         </p:spPr>
       </p:pic>
       <p:sp>
@@ -3590,7 +3579,7 @@
             <a:spLocks noGrp="1"/>
           </p:cNvSpPr>
           <p:nvPr>
-            <p:ph type="dt" sz="half" idx="10"/>
+            <p:ph idx="10" sz="half" type="dt"/>
           </p:nvPr>
         </p:nvSpPr>
         <p:spPr/>
@@ -3600,7 +3589,7 @@
           <a:p>
             <a:fld id="{5C2C3F0B-2B7F-4782-B315-33E516447C25}" type="datetimeFigureOut">
               <a:rPr lang="en-US" smtClean="0"/>
-              <a:t>3/2/2026</a:t>
+              <a:t>3/21/2019</a:t>
             </a:fld>
             <a:endParaRPr lang="en-US"/>
           </a:p>
@@ -3613,7 +3602,7 @@
             <a:spLocks noGrp="1"/>
           </p:cNvSpPr>
           <p:nvPr>
-            <p:ph type="ftr" sz="quarter" idx="11"/>
+            <p:ph idx="11" sz="quarter" type="ftr"/>
           </p:nvPr>
         </p:nvSpPr>
         <p:spPr/>
@@ -3632,7 +3621,7 @@
             <a:spLocks noGrp="1"/>
           </p:cNvSpPr>
           <p:nvPr>
-            <p:ph type="sldNum" sz="quarter" idx="12"/>
+            <p:ph idx="12" sz="quarter" type="sldNum"/>
           </p:nvPr>
         </p:nvSpPr>
         <p:spPr/>
@@ -3642,7 +3631,7 @@
           <a:p>
             <a:fld id="{6FACB95C-998B-4B89-BDB5-3B69D78FCBB4}" type="slidenum">
               <a:rPr lang="en-US" smtClean="0"/>
-              <a:t>11</a:t>
+              <a:t>‹#›</a:t>
             </a:fld>
             <a:endParaRPr lang="en-US"/>
           </a:p>
@@ -3655,15 +3644,12 @@
       </p:ext>
     </p:extLst>
   </p:cSld>
-  <p:clrMapOvr>
-    <a:masterClrMapping/>
-  </p:clrMapOvr>
 </p:sld>
 </file>
 
 <file path=ppt/slides/slide12.xml><?xml version="1.0" encoding="utf-8"?>
-<p:sld xmlns:a="http://schemas.openxmlformats.org/drawingml/2006/main" xmlns:r="http://schemas.openxmlformats.org/officeDocument/2006/relationships" xmlns:p="http://schemas.openxmlformats.org/presentationml/2006/main">
-  <p:cSld>
+<p:sld xmlns:a="http://schemas.openxmlformats.org/drawingml/2006/main" xmlns:p="http://schemas.openxmlformats.org/presentationml/2006/main" xmlns:r="http://schemas.openxmlformats.org/officeDocument/2006/relationships">
+  <p:cSld name="">
     <p:spTree>
       <p:nvGrpSpPr>
         <p:cNvPr id="1" name=""/>
@@ -3703,14 +3689,14 @@
         <p:nvPicPr>
           <p:cNvPr id="3" name="Content"/>
           <p:cNvPicPr>
-            <a:picLocks noGrp="1" noChangeAspect="1"/>
+            <a:picLocks noChangeAspect="1" noGrp="1"/>
           </p:cNvPicPr>
           <p:nvPr>
             <p:ph idx="1"/>
           </p:nvPr>
         </p:nvPicPr>
         <p:blipFill>
-          <a:blip r:embed="rId2" cstate="print">
+          <a:blip r:embed="rId2">
             <a:extLst>
               <a:ext uri="{28A0092B-C50C-407E-A947-70E740481C1C}">
                 <a14:useLocalDpi xmlns:a14="http://schemas.microsoft.com/office/drawing/2010/main" val="0"/>
@@ -3723,12 +3709,10 @@
         </p:blipFill>
         <p:spPr>
           <a:xfrm>
-            <a:off x="2589717" y="1825625"/>
-            <a:ext cx="7012564" cy="4351338"/>
+            <a:off x="2525874" y="1825625"/>
+            <a:ext cx="7140250" cy="4351338"/>
           </a:xfrm>
-          <a:prstGeom prst="rect">
-            <a:avLst/>
-          </a:prstGeom>
+          <a:prstGeom prst="rect"/>
         </p:spPr>
       </p:pic>
       <p:sp>
@@ -3738,7 +3722,7 @@
             <a:spLocks noGrp="1"/>
           </p:cNvSpPr>
           <p:nvPr>
-            <p:ph type="dt" sz="half" idx="10"/>
+            <p:ph idx="10" sz="half" type="dt"/>
           </p:nvPr>
         </p:nvSpPr>
         <p:spPr/>
@@ -3748,7 +3732,7 @@
           <a:p>
             <a:fld id="{5C2C3F0B-2B7F-4782-B315-33E516447C25}" type="datetimeFigureOut">
               <a:rPr lang="en-US" smtClean="0"/>
-              <a:t>3/2/2026</a:t>
+              <a:t>3/21/2019</a:t>
             </a:fld>
             <a:endParaRPr lang="en-US"/>
           </a:p>
@@ -3761,7 +3745,7 @@
             <a:spLocks noGrp="1"/>
           </p:cNvSpPr>
           <p:nvPr>
-            <p:ph type="ftr" sz="quarter" idx="11"/>
+            <p:ph idx="11" sz="quarter" type="ftr"/>
           </p:nvPr>
         </p:nvSpPr>
         <p:spPr/>
@@ -3780,7 +3764,7 @@
             <a:spLocks noGrp="1"/>
           </p:cNvSpPr>
           <p:nvPr>
-            <p:ph type="sldNum" sz="quarter" idx="12"/>
+            <p:ph idx="12" sz="quarter" type="sldNum"/>
           </p:nvPr>
         </p:nvSpPr>
         <p:spPr/>
@@ -3790,7 +3774,7 @@
           <a:p>
             <a:fld id="{6FACB95C-998B-4B89-BDB5-3B69D78FCBB4}" type="slidenum">
               <a:rPr lang="en-US" smtClean="0"/>
-              <a:t>12</a:t>
+              <a:t>‹#›</a:t>
             </a:fld>
             <a:endParaRPr lang="en-US"/>
           </a:p>
@@ -3803,15 +3787,12 @@
       </p:ext>
     </p:extLst>
   </p:cSld>
-  <p:clrMapOvr>
-    <a:masterClrMapping/>
-  </p:clrMapOvr>
 </p:sld>
 </file>
 
 <file path=ppt/slides/slide13.xml><?xml version="1.0" encoding="utf-8"?>
-<p:sld xmlns:a="http://schemas.openxmlformats.org/drawingml/2006/main" xmlns:r="http://schemas.openxmlformats.org/officeDocument/2006/relationships" xmlns:p="http://schemas.openxmlformats.org/presentationml/2006/main">
-  <p:cSld>
+<p:sld xmlns:a="http://schemas.openxmlformats.org/drawingml/2006/main" xmlns:p="http://schemas.openxmlformats.org/presentationml/2006/main" xmlns:r="http://schemas.openxmlformats.org/officeDocument/2006/relationships">
+  <p:cSld name="">
     <p:spTree>
       <p:nvGrpSpPr>
         <p:cNvPr id="1" name=""/>
@@ -3851,7 +3832,7 @@
         <p:nvPicPr>
           <p:cNvPr id="3" name="Content"/>
           <p:cNvPicPr>
-            <a:picLocks noGrp="1" noChangeAspect="1"/>
+            <a:picLocks noChangeAspect="1" noGrp="1"/>
           </p:cNvPicPr>
           <p:nvPr>
             <p:ph idx="1"/>
@@ -3865,19 +3846,16 @@
               </a:ext>
             </a:extLst>
           </a:blip>
-          <a:srcRect r="33493"/>
           <a:stretch>
             <a:fillRect/>
           </a:stretch>
         </p:blipFill>
         <p:spPr>
           <a:xfrm>
-            <a:off x="2039631" y="2190973"/>
-            <a:ext cx="6993657" cy="3120384"/>
+            <a:off x="838200" y="1859959"/>
+            <a:ext cx="10515600" cy="4282669"/>
           </a:xfrm>
-          <a:prstGeom prst="rect">
-            <a:avLst/>
-          </a:prstGeom>
+          <a:prstGeom prst="rect"/>
         </p:spPr>
       </p:pic>
       <p:sp>
@@ -3887,7 +3865,7 @@
             <a:spLocks noGrp="1"/>
           </p:cNvSpPr>
           <p:nvPr>
-            <p:ph type="dt" sz="half" idx="10"/>
+            <p:ph idx="10" sz="half" type="dt"/>
           </p:nvPr>
         </p:nvSpPr>
         <p:spPr/>
@@ -3897,7 +3875,7 @@
           <a:p>
             <a:fld id="{5C2C3F0B-2B7F-4782-B315-33E516447C25}" type="datetimeFigureOut">
               <a:rPr lang="en-US" smtClean="0"/>
-              <a:t>3/2/2026</a:t>
+              <a:t>3/21/2019</a:t>
             </a:fld>
             <a:endParaRPr lang="en-US"/>
           </a:p>
@@ -3910,7 +3888,7 @@
             <a:spLocks noGrp="1"/>
           </p:cNvSpPr>
           <p:nvPr>
-            <p:ph type="ftr" sz="quarter" idx="11"/>
+            <p:ph idx="11" sz="quarter" type="ftr"/>
           </p:nvPr>
         </p:nvSpPr>
         <p:spPr/>
@@ -3929,7 +3907,7 @@
             <a:spLocks noGrp="1"/>
           </p:cNvSpPr>
           <p:nvPr>
-            <p:ph type="sldNum" sz="quarter" idx="12"/>
+            <p:ph idx="12" sz="quarter" type="sldNum"/>
           </p:nvPr>
         </p:nvSpPr>
         <p:spPr/>
@@ -3939,7 +3917,7 @@
           <a:p>
             <a:fld id="{6FACB95C-998B-4B89-BDB5-3B69D78FCBB4}" type="slidenum">
               <a:rPr lang="en-US" smtClean="0"/>
-              <a:t>13</a:t>
+              <a:t>‹#›</a:t>
             </a:fld>
             <a:endParaRPr lang="en-US"/>
           </a:p>
@@ -3952,15 +3930,12 @@
       </p:ext>
     </p:extLst>
   </p:cSld>
-  <p:clrMapOvr>
-    <a:masterClrMapping/>
-  </p:clrMapOvr>
 </p:sld>
 </file>
 
-<file path=ppt/slides/slide2.xml><?xml version="1.0" encoding="utf-8"?>
-<p:sld xmlns:a="http://schemas.openxmlformats.org/drawingml/2006/main" xmlns:r="http://schemas.openxmlformats.org/officeDocument/2006/relationships" xmlns:p="http://schemas.openxmlformats.org/presentationml/2006/main">
-  <p:cSld>
+<file path=ppt/slides/slide14.xml><?xml version="1.0" encoding="utf-8"?>
+<p:sld xmlns:a="http://schemas.openxmlformats.org/drawingml/2006/main" xmlns:p="http://schemas.openxmlformats.org/presentationml/2006/main" xmlns:r="http://schemas.openxmlformats.org/officeDocument/2006/relationships">
+  <p:cSld name="">
     <p:spTree>
       <p:nvGrpSpPr>
         <p:cNvPr id="1" name=""/>
@@ -3991,7 +3966,7 @@
           <a:lstStyle/>
           <a:p>
             <a:r>
-              <a:t>Channel Comparison - PC KDR</a:t>
+              <a:t>Figure 18 - Complete targeted channel set</a:t>
             </a:r>
           </a:p>
         </p:txBody>
@@ -4000,14 +3975,14 @@
         <p:nvPicPr>
           <p:cNvPr id="3" name="Content"/>
           <p:cNvPicPr>
-            <a:picLocks noGrp="1" noChangeAspect="1"/>
+            <a:picLocks noChangeAspect="1" noGrp="1"/>
           </p:cNvPicPr>
           <p:nvPr>
             <p:ph idx="1"/>
           </p:nvPr>
         </p:nvPicPr>
         <p:blipFill>
-          <a:blip r:embed="rId2" cstate="print">
+          <a:blip r:embed="rId2">
             <a:extLst>
               <a:ext uri="{28A0092B-C50C-407E-A947-70E740481C1C}">
                 <a14:useLocalDpi xmlns:a14="http://schemas.microsoft.com/office/drawing/2010/main" val="0"/>
@@ -4020,12 +3995,10 @@
         </p:blipFill>
         <p:spPr>
           <a:xfrm>
-            <a:off x="2592224" y="1825625"/>
-            <a:ext cx="7007551" cy="4351338"/>
+            <a:off x="2004068" y="1825625"/>
+            <a:ext cx="8183862" cy="4351338"/>
           </a:xfrm>
-          <a:prstGeom prst="rect">
-            <a:avLst/>
-          </a:prstGeom>
+          <a:prstGeom prst="rect"/>
         </p:spPr>
       </p:pic>
       <p:sp>
@@ -4035,7 +4008,7 @@
             <a:spLocks noGrp="1"/>
           </p:cNvSpPr>
           <p:nvPr>
-            <p:ph type="dt" sz="half" idx="10"/>
+            <p:ph idx="10" sz="half" type="dt"/>
           </p:nvPr>
         </p:nvSpPr>
         <p:spPr/>
@@ -4045,7 +4018,7 @@
           <a:p>
             <a:fld id="{5C2C3F0B-2B7F-4782-B315-33E516447C25}" type="datetimeFigureOut">
               <a:rPr lang="en-US" smtClean="0"/>
-              <a:t>3/2/2026</a:t>
+              <a:t>3/21/2019</a:t>
             </a:fld>
             <a:endParaRPr lang="en-US"/>
           </a:p>
@@ -4058,7 +4031,7 @@
             <a:spLocks noGrp="1"/>
           </p:cNvSpPr>
           <p:nvPr>
-            <p:ph type="ftr" sz="quarter" idx="11"/>
+            <p:ph idx="11" sz="quarter" type="ftr"/>
           </p:nvPr>
         </p:nvSpPr>
         <p:spPr/>
@@ -4077,7 +4050,7 @@
             <a:spLocks noGrp="1"/>
           </p:cNvSpPr>
           <p:nvPr>
-            <p:ph type="sldNum" sz="quarter" idx="12"/>
+            <p:ph idx="12" sz="quarter" type="sldNum"/>
           </p:nvPr>
         </p:nvSpPr>
         <p:spPr/>
@@ -4087,7 +4060,7 @@
           <a:p>
             <a:fld id="{6FACB95C-998B-4B89-BDB5-3B69D78FCBB4}" type="slidenum">
               <a:rPr lang="en-US" smtClean="0"/>
-              <a:t>2</a:t>
+              <a:t>‹#›</a:t>
             </a:fld>
             <a:endParaRPr lang="en-US"/>
           </a:p>
@@ -4100,15 +4073,12 @@
       </p:ext>
     </p:extLst>
   </p:cSld>
-  <p:clrMapOvr>
-    <a:masterClrMapping/>
-  </p:clrMapOvr>
 </p:sld>
 </file>
 
-<file path=ppt/slides/slide3.xml><?xml version="1.0" encoding="utf-8"?>
-<p:sld xmlns:a="http://schemas.openxmlformats.org/drawingml/2006/main" xmlns:r="http://schemas.openxmlformats.org/officeDocument/2006/relationships" xmlns:p="http://schemas.openxmlformats.org/presentationml/2006/main">
-  <p:cSld>
+<file path=ppt/slides/slide2.xml><?xml version="1.0" encoding="utf-8"?>
+<p:sld xmlns:a="http://schemas.openxmlformats.org/drawingml/2006/main" xmlns:p="http://schemas.openxmlformats.org/presentationml/2006/main" xmlns:r="http://schemas.openxmlformats.org/officeDocument/2006/relationships">
+  <p:cSld name="">
     <p:spTree>
       <p:nvGrpSpPr>
         <p:cNvPr id="1" name=""/>
@@ -4139,7 +4109,7 @@
           <a:lstStyle/>
           <a:p>
             <a:r>
-              <a:t>Channel Comparison - PVBC Na</a:t>
+              <a:t>Channel Comparison - PC KDR</a:t>
             </a:r>
           </a:p>
         </p:txBody>
@@ -4148,14 +4118,14 @@
         <p:nvPicPr>
           <p:cNvPr id="3" name="Content"/>
           <p:cNvPicPr>
-            <a:picLocks noGrp="1" noChangeAspect="1"/>
+            <a:picLocks noChangeAspect="1" noGrp="1"/>
           </p:cNvPicPr>
           <p:nvPr>
             <p:ph idx="1"/>
           </p:nvPr>
         </p:nvPicPr>
         <p:blipFill>
-          <a:blip r:embed="rId2" cstate="print">
+          <a:blip r:embed="rId2">
             <a:extLst>
               <a:ext uri="{28A0092B-C50C-407E-A947-70E740481C1C}">
                 <a14:useLocalDpi xmlns:a14="http://schemas.microsoft.com/office/drawing/2010/main" val="0"/>
@@ -4168,12 +4138,10 @@
         </p:blipFill>
         <p:spPr>
           <a:xfrm>
-            <a:off x="2433597" y="1825625"/>
-            <a:ext cx="7324804" cy="4351338"/>
+            <a:off x="2523272" y="1825625"/>
+            <a:ext cx="7145455" cy="4351338"/>
           </a:xfrm>
-          <a:prstGeom prst="rect">
-            <a:avLst/>
-          </a:prstGeom>
+          <a:prstGeom prst="rect"/>
         </p:spPr>
       </p:pic>
       <p:sp>
@@ -4183,7 +4151,7 @@
             <a:spLocks noGrp="1"/>
           </p:cNvSpPr>
           <p:nvPr>
-            <p:ph type="dt" sz="half" idx="10"/>
+            <p:ph idx="10" sz="half" type="dt"/>
           </p:nvPr>
         </p:nvSpPr>
         <p:spPr/>
@@ -4193,7 +4161,7 @@
           <a:p>
             <a:fld id="{5C2C3F0B-2B7F-4782-B315-33E516447C25}" type="datetimeFigureOut">
               <a:rPr lang="en-US" smtClean="0"/>
-              <a:t>3/2/2026</a:t>
+              <a:t>3/21/2019</a:t>
             </a:fld>
             <a:endParaRPr lang="en-US"/>
           </a:p>
@@ -4206,7 +4174,7 @@
             <a:spLocks noGrp="1"/>
           </p:cNvSpPr>
           <p:nvPr>
-            <p:ph type="ftr" sz="quarter" idx="11"/>
+            <p:ph idx="11" sz="quarter" type="ftr"/>
           </p:nvPr>
         </p:nvSpPr>
         <p:spPr/>
@@ -4225,7 +4193,7 @@
             <a:spLocks noGrp="1"/>
           </p:cNvSpPr>
           <p:nvPr>
-            <p:ph type="sldNum" sz="quarter" idx="12"/>
+            <p:ph idx="12" sz="quarter" type="sldNum"/>
           </p:nvPr>
         </p:nvSpPr>
         <p:spPr/>
@@ -4235,7 +4203,7 @@
           <a:p>
             <a:fld id="{6FACB95C-998B-4B89-BDB5-3B69D78FCBB4}" type="slidenum">
               <a:rPr lang="en-US" smtClean="0"/>
-              <a:t>3</a:t>
+              <a:t>‹#›</a:t>
             </a:fld>
             <a:endParaRPr lang="en-US"/>
           </a:p>
@@ -4248,15 +4216,12 @@
       </p:ext>
     </p:extLst>
   </p:cSld>
-  <p:clrMapOvr>
-    <a:masterClrMapping/>
-  </p:clrMapOvr>
 </p:sld>
 </file>
 
-<file path=ppt/slides/slide4.xml><?xml version="1.0" encoding="utf-8"?>
-<p:sld xmlns:a="http://schemas.openxmlformats.org/drawingml/2006/main" xmlns:r="http://schemas.openxmlformats.org/officeDocument/2006/relationships" xmlns:p="http://schemas.openxmlformats.org/presentationml/2006/main">
-  <p:cSld>
+<file path=ppt/slides/slide3.xml><?xml version="1.0" encoding="utf-8"?>
+<p:sld xmlns:a="http://schemas.openxmlformats.org/drawingml/2006/main" xmlns:p="http://schemas.openxmlformats.org/presentationml/2006/main" xmlns:r="http://schemas.openxmlformats.org/officeDocument/2006/relationships">
+  <p:cSld name="">
     <p:spTree>
       <p:nvGrpSpPr>
         <p:cNvPr id="1" name=""/>
@@ -4287,7 +4252,7 @@
           <a:lstStyle/>
           <a:p>
             <a:r>
-              <a:t>Channel Comparison - PVBC KDR</a:t>
+              <a:t>Channel Comparison - PVBC Na</a:t>
             </a:r>
           </a:p>
         </p:txBody>
@@ -4296,14 +4261,14 @@
         <p:nvPicPr>
           <p:cNvPr id="3" name="Content"/>
           <p:cNvPicPr>
-            <a:picLocks noGrp="1" noChangeAspect="1"/>
+            <a:picLocks noChangeAspect="1" noGrp="1"/>
           </p:cNvPicPr>
           <p:nvPr>
             <p:ph idx="1"/>
           </p:nvPr>
         </p:nvPicPr>
         <p:blipFill>
-          <a:blip r:embed="rId2" cstate="print">
+          <a:blip r:embed="rId2">
             <a:extLst>
               <a:ext uri="{28A0092B-C50C-407E-A947-70E740481C1C}">
                 <a14:useLocalDpi xmlns:a14="http://schemas.microsoft.com/office/drawing/2010/main" val="0"/>
@@ -4316,12 +4281,10 @@
         </p:blipFill>
         <p:spPr>
           <a:xfrm>
-            <a:off x="2592224" y="1825625"/>
-            <a:ext cx="7007551" cy="4351338"/>
+            <a:off x="2364244" y="1825625"/>
+            <a:ext cx="7463511" cy="4351338"/>
           </a:xfrm>
-          <a:prstGeom prst="rect">
-            <a:avLst/>
-          </a:prstGeom>
+          <a:prstGeom prst="rect"/>
         </p:spPr>
       </p:pic>
       <p:sp>
@@ -4331,7 +4294,7 @@
             <a:spLocks noGrp="1"/>
           </p:cNvSpPr>
           <p:nvPr>
-            <p:ph type="dt" sz="half" idx="10"/>
+            <p:ph idx="10" sz="half" type="dt"/>
           </p:nvPr>
         </p:nvSpPr>
         <p:spPr/>
@@ -4341,7 +4304,7 @@
           <a:p>
             <a:fld id="{5C2C3F0B-2B7F-4782-B315-33E516447C25}" type="datetimeFigureOut">
               <a:rPr lang="en-US" smtClean="0"/>
-              <a:t>3/2/2026</a:t>
+              <a:t>3/21/2019</a:t>
             </a:fld>
             <a:endParaRPr lang="en-US"/>
           </a:p>
@@ -4354,7 +4317,7 @@
             <a:spLocks noGrp="1"/>
           </p:cNvSpPr>
           <p:nvPr>
-            <p:ph type="ftr" sz="quarter" idx="11"/>
+            <p:ph idx="11" sz="quarter" type="ftr"/>
           </p:nvPr>
         </p:nvSpPr>
         <p:spPr/>
@@ -4373,7 +4336,7 @@
             <a:spLocks noGrp="1"/>
           </p:cNvSpPr>
           <p:nvPr>
-            <p:ph type="sldNum" sz="quarter" idx="12"/>
+            <p:ph idx="12" sz="quarter" type="sldNum"/>
           </p:nvPr>
         </p:nvSpPr>
         <p:spPr/>
@@ -4383,7 +4346,7 @@
           <a:p>
             <a:fld id="{6FACB95C-998B-4B89-BDB5-3B69D78FCBB4}" type="slidenum">
               <a:rPr lang="en-US" smtClean="0"/>
-              <a:t>4</a:t>
+              <a:t>‹#›</a:t>
             </a:fld>
             <a:endParaRPr lang="en-US"/>
           </a:p>
@@ -4396,15 +4359,12 @@
       </p:ext>
     </p:extLst>
   </p:cSld>
-  <p:clrMapOvr>
-    <a:masterClrMapping/>
-  </p:clrMapOvr>
 </p:sld>
 </file>
 
-<file path=ppt/slides/slide5.xml><?xml version="1.0" encoding="utf-8"?>
-<p:sld xmlns:a="http://schemas.openxmlformats.org/drawingml/2006/main" xmlns:r="http://schemas.openxmlformats.org/officeDocument/2006/relationships" xmlns:p="http://schemas.openxmlformats.org/presentationml/2006/main">
-  <p:cSld>
+<file path=ppt/slides/slide4.xml><?xml version="1.0" encoding="utf-8"?>
+<p:sld xmlns:a="http://schemas.openxmlformats.org/drawingml/2006/main" xmlns:p="http://schemas.openxmlformats.org/presentationml/2006/main" xmlns:r="http://schemas.openxmlformats.org/officeDocument/2006/relationships">
+  <p:cSld name="">
     <p:spTree>
       <p:nvGrpSpPr>
         <p:cNvPr id="1" name=""/>
@@ -4435,7 +4395,7 @@
           <a:lstStyle/>
           <a:p>
             <a:r>
-              <a:t>Channel Comparison - PC A-type K</a:t>
+              <a:t>Channel Comparison - PVBC KDR</a:t>
             </a:r>
           </a:p>
         </p:txBody>
@@ -4444,14 +4404,14 @@
         <p:nvPicPr>
           <p:cNvPr id="3" name="Content"/>
           <p:cNvPicPr>
-            <a:picLocks noGrp="1" noChangeAspect="1"/>
+            <a:picLocks noChangeAspect="1" noGrp="1"/>
           </p:cNvPicPr>
           <p:nvPr>
             <p:ph idx="1"/>
           </p:nvPr>
         </p:nvPicPr>
         <p:blipFill>
-          <a:blip r:embed="rId2" cstate="print">
+          <a:blip r:embed="rId2">
             <a:extLst>
               <a:ext uri="{28A0092B-C50C-407E-A947-70E740481C1C}">
                 <a14:useLocalDpi xmlns:a14="http://schemas.microsoft.com/office/drawing/2010/main" val="0"/>
@@ -4464,12 +4424,10 @@
         </p:blipFill>
         <p:spPr>
           <a:xfrm>
-            <a:off x="2592224" y="1825625"/>
-            <a:ext cx="7007551" cy="4351338"/>
+            <a:off x="2523272" y="1825625"/>
+            <a:ext cx="7145455" cy="4351338"/>
           </a:xfrm>
-          <a:prstGeom prst="rect">
-            <a:avLst/>
-          </a:prstGeom>
+          <a:prstGeom prst="rect"/>
         </p:spPr>
       </p:pic>
       <p:sp>
@@ -4479,7 +4437,7 @@
             <a:spLocks noGrp="1"/>
           </p:cNvSpPr>
           <p:nvPr>
-            <p:ph type="dt" sz="half" idx="10"/>
+            <p:ph idx="10" sz="half" type="dt"/>
           </p:nvPr>
         </p:nvSpPr>
         <p:spPr/>
@@ -4489,7 +4447,7 @@
           <a:p>
             <a:fld id="{5C2C3F0B-2B7F-4782-B315-33E516447C25}" type="datetimeFigureOut">
               <a:rPr lang="en-US" smtClean="0"/>
-              <a:t>3/2/2026</a:t>
+              <a:t>3/21/2019</a:t>
             </a:fld>
             <a:endParaRPr lang="en-US"/>
           </a:p>
@@ -4502,7 +4460,7 @@
             <a:spLocks noGrp="1"/>
           </p:cNvSpPr>
           <p:nvPr>
-            <p:ph type="ftr" sz="quarter" idx="11"/>
+            <p:ph idx="11" sz="quarter" type="ftr"/>
           </p:nvPr>
         </p:nvSpPr>
         <p:spPr/>
@@ -4521,7 +4479,7 @@
             <a:spLocks noGrp="1"/>
           </p:cNvSpPr>
           <p:nvPr>
-            <p:ph type="sldNum" sz="quarter" idx="12"/>
+            <p:ph idx="12" sz="quarter" type="sldNum"/>
           </p:nvPr>
         </p:nvSpPr>
         <p:spPr/>
@@ -4531,7 +4489,7 @@
           <a:p>
             <a:fld id="{6FACB95C-998B-4B89-BDB5-3B69D78FCBB4}" type="slidenum">
               <a:rPr lang="en-US" smtClean="0"/>
-              <a:t>5</a:t>
+              <a:t>‹#›</a:t>
             </a:fld>
             <a:endParaRPr lang="en-US"/>
           </a:p>
@@ -4544,15 +4502,12 @@
       </p:ext>
     </p:extLst>
   </p:cSld>
-  <p:clrMapOvr>
-    <a:masterClrMapping/>
-  </p:clrMapOvr>
 </p:sld>
 </file>
 
-<file path=ppt/slides/slide6.xml><?xml version="1.0" encoding="utf-8"?>
-<p:sld xmlns:a="http://schemas.openxmlformats.org/drawingml/2006/main" xmlns:r="http://schemas.openxmlformats.org/officeDocument/2006/relationships" xmlns:p="http://schemas.openxmlformats.org/presentationml/2006/main">
-  <p:cSld>
+<file path=ppt/slides/slide5.xml><?xml version="1.0" encoding="utf-8"?>
+<p:sld xmlns:a="http://schemas.openxmlformats.org/drawingml/2006/main" xmlns:p="http://schemas.openxmlformats.org/presentationml/2006/main" xmlns:r="http://schemas.openxmlformats.org/officeDocument/2006/relationships">
+  <p:cSld name="">
     <p:spTree>
       <p:nvGrpSpPr>
         <p:cNvPr id="1" name=""/>
@@ -4583,7 +4538,7 @@
           <a:lstStyle/>
           <a:p>
             <a:r>
-              <a:t>Channel Comparison - PVBC A-type K</a:t>
+              <a:t>Channel Comparison - PC A-type K</a:t>
             </a:r>
           </a:p>
         </p:txBody>
@@ -4592,14 +4547,14 @@
         <p:nvPicPr>
           <p:cNvPr id="3" name="Content"/>
           <p:cNvPicPr>
-            <a:picLocks noGrp="1" noChangeAspect="1"/>
+            <a:picLocks noChangeAspect="1" noGrp="1"/>
           </p:cNvPicPr>
           <p:nvPr>
             <p:ph idx="1"/>
           </p:nvPr>
         </p:nvPicPr>
         <p:blipFill>
-          <a:blip r:embed="rId2" cstate="print">
+          <a:blip r:embed="rId2">
             <a:extLst>
               <a:ext uri="{28A0092B-C50C-407E-A947-70E740481C1C}">
                 <a14:useLocalDpi xmlns:a14="http://schemas.microsoft.com/office/drawing/2010/main" val="0"/>
@@ -4612,12 +4567,10 @@
         </p:blipFill>
         <p:spPr>
           <a:xfrm>
-            <a:off x="2592224" y="1825625"/>
-            <a:ext cx="7007551" cy="4351338"/>
+            <a:off x="2525874" y="1825625"/>
+            <a:ext cx="7140250" cy="4351338"/>
           </a:xfrm>
-          <a:prstGeom prst="rect">
-            <a:avLst/>
-          </a:prstGeom>
+          <a:prstGeom prst="rect"/>
         </p:spPr>
       </p:pic>
       <p:sp>
@@ -4627,7 +4580,7 @@
             <a:spLocks noGrp="1"/>
           </p:cNvSpPr>
           <p:nvPr>
-            <p:ph type="dt" sz="half" idx="10"/>
+            <p:ph idx="10" sz="half" type="dt"/>
           </p:nvPr>
         </p:nvSpPr>
         <p:spPr/>
@@ -4637,7 +4590,7 @@
           <a:p>
             <a:fld id="{5C2C3F0B-2B7F-4782-B315-33E516447C25}" type="datetimeFigureOut">
               <a:rPr lang="en-US" smtClean="0"/>
-              <a:t>3/2/2026</a:t>
+              <a:t>3/21/2019</a:t>
             </a:fld>
             <a:endParaRPr lang="en-US"/>
           </a:p>
@@ -4650,7 +4603,7 @@
             <a:spLocks noGrp="1"/>
           </p:cNvSpPr>
           <p:nvPr>
-            <p:ph type="ftr" sz="quarter" idx="11"/>
+            <p:ph idx="11" sz="quarter" type="ftr"/>
           </p:nvPr>
         </p:nvSpPr>
         <p:spPr/>
@@ -4669,7 +4622,7 @@
             <a:spLocks noGrp="1"/>
           </p:cNvSpPr>
           <p:nvPr>
-            <p:ph type="sldNum" sz="quarter" idx="12"/>
+            <p:ph idx="12" sz="quarter" type="sldNum"/>
           </p:nvPr>
         </p:nvSpPr>
         <p:spPr/>
@@ -4679,7 +4632,7 @@
           <a:p>
             <a:fld id="{6FACB95C-998B-4B89-BDB5-3B69D78FCBB4}" type="slidenum">
               <a:rPr lang="en-US" smtClean="0"/>
-              <a:t>6</a:t>
+              <a:t>‹#›</a:t>
             </a:fld>
             <a:endParaRPr lang="en-US"/>
           </a:p>
@@ -4692,15 +4645,12 @@
       </p:ext>
     </p:extLst>
   </p:cSld>
-  <p:clrMapOvr>
-    <a:masterClrMapping/>
-  </p:clrMapOvr>
 </p:sld>
 </file>
 
-<file path=ppt/slides/slide7.xml><?xml version="1.0" encoding="utf-8"?>
-<p:sld xmlns:a="http://schemas.openxmlformats.org/drawingml/2006/main" xmlns:r="http://schemas.openxmlformats.org/officeDocument/2006/relationships" xmlns:p="http://schemas.openxmlformats.org/presentationml/2006/main">
-  <p:cSld>
+<file path=ppt/slides/slide6.xml><?xml version="1.0" encoding="utf-8"?>
+<p:sld xmlns:a="http://schemas.openxmlformats.org/drawingml/2006/main" xmlns:p="http://schemas.openxmlformats.org/presentationml/2006/main" xmlns:r="http://schemas.openxmlformats.org/officeDocument/2006/relationships">
+  <p:cSld name="">
     <p:spTree>
       <p:nvGrpSpPr>
         <p:cNvPr id="1" name=""/>
@@ -4731,7 +4681,7 @@
           <a:lstStyle/>
           <a:p>
             <a:r>
-              <a:t>Channel Comparison - BlueBrain PC M-type K</a:t>
+              <a:t>Channel Comparison - PVBC A-type K</a:t>
             </a:r>
           </a:p>
         </p:txBody>
@@ -4740,14 +4690,14 @@
         <p:nvPicPr>
           <p:cNvPr id="3" name="Content"/>
           <p:cNvPicPr>
-            <a:picLocks noGrp="1" noChangeAspect="1"/>
+            <a:picLocks noChangeAspect="1" noGrp="1"/>
           </p:cNvPicPr>
           <p:nvPr>
             <p:ph idx="1"/>
           </p:nvPr>
         </p:nvPicPr>
         <p:blipFill>
-          <a:blip r:embed="rId2" cstate="print">
+          <a:blip r:embed="rId2">
             <a:extLst>
               <a:ext uri="{28A0092B-C50C-407E-A947-70E740481C1C}">
                 <a14:useLocalDpi xmlns:a14="http://schemas.microsoft.com/office/drawing/2010/main" val="0"/>
@@ -4760,12 +4710,10 @@
         </p:blipFill>
         <p:spPr>
           <a:xfrm>
-            <a:off x="2582893" y="1825625"/>
-            <a:ext cx="7026213" cy="4351338"/>
+            <a:off x="2525874" y="1825625"/>
+            <a:ext cx="7140250" cy="4351338"/>
           </a:xfrm>
-          <a:prstGeom prst="rect">
-            <a:avLst/>
-          </a:prstGeom>
+          <a:prstGeom prst="rect"/>
         </p:spPr>
       </p:pic>
       <p:sp>
@@ -4775,7 +4723,7 @@
             <a:spLocks noGrp="1"/>
           </p:cNvSpPr>
           <p:nvPr>
-            <p:ph type="dt" sz="half" idx="10"/>
+            <p:ph idx="10" sz="half" type="dt"/>
           </p:nvPr>
         </p:nvSpPr>
         <p:spPr/>
@@ -4785,7 +4733,7 @@
           <a:p>
             <a:fld id="{5C2C3F0B-2B7F-4782-B315-33E516447C25}" type="datetimeFigureOut">
               <a:rPr lang="en-US" smtClean="0"/>
-              <a:t>3/2/2026</a:t>
+              <a:t>3/21/2019</a:t>
             </a:fld>
             <a:endParaRPr lang="en-US"/>
           </a:p>
@@ -4798,7 +4746,7 @@
             <a:spLocks noGrp="1"/>
           </p:cNvSpPr>
           <p:nvPr>
-            <p:ph type="ftr" sz="quarter" idx="11"/>
+            <p:ph idx="11" sz="quarter" type="ftr"/>
           </p:nvPr>
         </p:nvSpPr>
         <p:spPr/>
@@ -4817,7 +4765,7 @@
             <a:spLocks noGrp="1"/>
           </p:cNvSpPr>
           <p:nvPr>
-            <p:ph type="sldNum" sz="quarter" idx="12"/>
+            <p:ph idx="12" sz="quarter" type="sldNum"/>
           </p:nvPr>
         </p:nvSpPr>
         <p:spPr/>
@@ -4827,7 +4775,7 @@
           <a:p>
             <a:fld id="{6FACB95C-998B-4B89-BDB5-3B69D78FCBB4}" type="slidenum">
               <a:rPr lang="en-US" smtClean="0"/>
-              <a:t>7</a:t>
+              <a:t>‹#›</a:t>
             </a:fld>
             <a:endParaRPr lang="en-US"/>
           </a:p>
@@ -4840,15 +4788,12 @@
       </p:ext>
     </p:extLst>
   </p:cSld>
-  <p:clrMapOvr>
-    <a:masterClrMapping/>
-  </p:clrMapOvr>
 </p:sld>
 </file>
 
-<file path=ppt/slides/slide8.xml><?xml version="1.0" encoding="utf-8"?>
-<p:sld xmlns:a="http://schemas.openxmlformats.org/drawingml/2006/main" xmlns:r="http://schemas.openxmlformats.org/officeDocument/2006/relationships" xmlns:p="http://schemas.openxmlformats.org/presentationml/2006/main">
-  <p:cSld>
+<file path=ppt/slides/slide7.xml><?xml version="1.0" encoding="utf-8"?>
+<p:sld xmlns:a="http://schemas.openxmlformats.org/drawingml/2006/main" xmlns:p="http://schemas.openxmlformats.org/presentationml/2006/main" xmlns:r="http://schemas.openxmlformats.org/officeDocument/2006/relationships">
+  <p:cSld name="">
     <p:spTree>
       <p:nvGrpSpPr>
         <p:cNvPr id="1" name=""/>
@@ -4879,7 +4824,7 @@
           <a:lstStyle/>
           <a:p>
             <a:r>
-              <a:t>Channel Comparison - BlueBrain PC T-type Ca</a:t>
+              <a:t>Channel Comparison - BlueBrain PC M-type K</a:t>
             </a:r>
           </a:p>
         </p:txBody>
@@ -4888,14 +4833,14 @@
         <p:nvPicPr>
           <p:cNvPr id="3" name="Content"/>
           <p:cNvPicPr>
-            <a:picLocks noGrp="1" noChangeAspect="1"/>
+            <a:picLocks noChangeAspect="1" noGrp="1"/>
           </p:cNvPicPr>
           <p:nvPr>
             <p:ph idx="1"/>
           </p:nvPr>
         </p:nvPicPr>
         <p:blipFill>
-          <a:blip r:embed="rId2" cstate="print">
+          <a:blip r:embed="rId2">
             <a:extLst>
               <a:ext uri="{28A0092B-C50C-407E-A947-70E740481C1C}">
                 <a14:useLocalDpi xmlns:a14="http://schemas.microsoft.com/office/drawing/2010/main" val="0"/>
@@ -4908,12 +4853,10 @@
         </p:blipFill>
         <p:spPr>
           <a:xfrm>
-            <a:off x="2589717" y="1825625"/>
-            <a:ext cx="7012564" cy="4351338"/>
+            <a:off x="2513757" y="1825625"/>
+            <a:ext cx="7164484" cy="4351338"/>
           </a:xfrm>
-          <a:prstGeom prst="rect">
-            <a:avLst/>
-          </a:prstGeom>
+          <a:prstGeom prst="rect"/>
         </p:spPr>
       </p:pic>
       <p:sp>
@@ -4923,7 +4866,7 @@
             <a:spLocks noGrp="1"/>
           </p:cNvSpPr>
           <p:nvPr>
-            <p:ph type="dt" sz="half" idx="10"/>
+            <p:ph idx="10" sz="half" type="dt"/>
           </p:nvPr>
         </p:nvSpPr>
         <p:spPr/>
@@ -4933,7 +4876,7 @@
           <a:p>
             <a:fld id="{5C2C3F0B-2B7F-4782-B315-33E516447C25}" type="datetimeFigureOut">
               <a:rPr lang="en-US" smtClean="0"/>
-              <a:t>3/2/2026</a:t>
+              <a:t>3/21/2019</a:t>
             </a:fld>
             <a:endParaRPr lang="en-US"/>
           </a:p>
@@ -4946,7 +4889,7 @@
             <a:spLocks noGrp="1"/>
           </p:cNvSpPr>
           <p:nvPr>
-            <p:ph type="ftr" sz="quarter" idx="11"/>
+            <p:ph idx="11" sz="quarter" type="ftr"/>
           </p:nvPr>
         </p:nvSpPr>
         <p:spPr/>
@@ -4965,7 +4908,7 @@
             <a:spLocks noGrp="1"/>
           </p:cNvSpPr>
           <p:nvPr>
-            <p:ph type="sldNum" sz="quarter" idx="12"/>
+            <p:ph idx="12" sz="quarter" type="sldNum"/>
           </p:nvPr>
         </p:nvSpPr>
         <p:spPr/>
@@ -4975,7 +4918,7 @@
           <a:p>
             <a:fld id="{6FACB95C-998B-4B89-BDB5-3B69D78FCBB4}" type="slidenum">
               <a:rPr lang="en-US" smtClean="0"/>
-              <a:t>8</a:t>
+              <a:t>‹#›</a:t>
             </a:fld>
             <a:endParaRPr lang="en-US"/>
           </a:p>
@@ -4988,15 +4931,12 @@
       </p:ext>
     </p:extLst>
   </p:cSld>
-  <p:clrMapOvr>
-    <a:masterClrMapping/>
-  </p:clrMapOvr>
 </p:sld>
 </file>
 
-<file path=ppt/slides/slide9.xml><?xml version="1.0" encoding="utf-8"?>
-<p:sld xmlns:a="http://schemas.openxmlformats.org/drawingml/2006/main" xmlns:r="http://schemas.openxmlformats.org/officeDocument/2006/relationships" xmlns:p="http://schemas.openxmlformats.org/presentationml/2006/main">
-  <p:cSld>
+<file path=ppt/slides/slide8.xml><?xml version="1.0" encoding="utf-8"?>
+<p:sld xmlns:a="http://schemas.openxmlformats.org/drawingml/2006/main" xmlns:p="http://schemas.openxmlformats.org/presentationml/2006/main" xmlns:r="http://schemas.openxmlformats.org/officeDocument/2006/relationships">
+  <p:cSld name="">
     <p:spTree>
       <p:nvGrpSpPr>
         <p:cNvPr id="1" name=""/>
@@ -5027,7 +4967,7 @@
           <a:lstStyle/>
           <a:p>
             <a:r>
-              <a:t>Channel Comparison - BlueBrain PVBC KDB</a:t>
+              <a:t>Channel Comparison - BlueBrain PC T-type Ca</a:t>
             </a:r>
           </a:p>
         </p:txBody>
@@ -5036,14 +4976,14 @@
         <p:nvPicPr>
           <p:cNvPr id="3" name="Content"/>
           <p:cNvPicPr>
-            <a:picLocks noGrp="1" noChangeAspect="1"/>
+            <a:picLocks noChangeAspect="1" noGrp="1"/>
           </p:cNvPicPr>
           <p:nvPr>
             <p:ph idx="1"/>
           </p:nvPr>
         </p:nvPicPr>
         <p:blipFill>
-          <a:blip r:embed="rId2" cstate="print">
+          <a:blip r:embed="rId2">
             <a:extLst>
               <a:ext uri="{28A0092B-C50C-407E-A947-70E740481C1C}">
                 <a14:useLocalDpi xmlns:a14="http://schemas.microsoft.com/office/drawing/2010/main" val="0"/>
@@ -5056,12 +4996,10 @@
         </p:blipFill>
         <p:spPr>
           <a:xfrm>
-            <a:off x="2582893" y="1825625"/>
-            <a:ext cx="7026213" cy="4351338"/>
+            <a:off x="2525874" y="1825625"/>
+            <a:ext cx="7140250" cy="4351338"/>
           </a:xfrm>
-          <a:prstGeom prst="rect">
-            <a:avLst/>
-          </a:prstGeom>
+          <a:prstGeom prst="rect"/>
         </p:spPr>
       </p:pic>
       <p:sp>
@@ -5071,7 +5009,7 @@
             <a:spLocks noGrp="1"/>
           </p:cNvSpPr>
           <p:nvPr>
-            <p:ph type="dt" sz="half" idx="10"/>
+            <p:ph idx="10" sz="half" type="dt"/>
           </p:nvPr>
         </p:nvSpPr>
         <p:spPr/>
@@ -5081,7 +5019,7 @@
           <a:p>
             <a:fld id="{5C2C3F0B-2B7F-4782-B315-33E516447C25}" type="datetimeFigureOut">
               <a:rPr lang="en-US" smtClean="0"/>
-              <a:t>3/2/2026</a:t>
+              <a:t>3/21/2019</a:t>
             </a:fld>
             <a:endParaRPr lang="en-US"/>
           </a:p>
@@ -5094,7 +5032,7 @@
             <a:spLocks noGrp="1"/>
           </p:cNvSpPr>
           <p:nvPr>
-            <p:ph type="ftr" sz="quarter" idx="11"/>
+            <p:ph idx="11" sz="quarter" type="ftr"/>
           </p:nvPr>
         </p:nvSpPr>
         <p:spPr/>
@@ -5113,7 +5051,7 @@
             <a:spLocks noGrp="1"/>
           </p:cNvSpPr>
           <p:nvPr>
-            <p:ph type="sldNum" sz="quarter" idx="12"/>
+            <p:ph idx="12" sz="quarter" type="sldNum"/>
           </p:nvPr>
         </p:nvSpPr>
         <p:spPr/>
@@ -5123,7 +5061,7 @@
           <a:p>
             <a:fld id="{6FACB95C-998B-4B89-BDB5-3B69D78FCBB4}" type="slidenum">
               <a:rPr lang="en-US" smtClean="0"/>
-              <a:t>9</a:t>
+              <a:t>‹#›</a:t>
             </a:fld>
             <a:endParaRPr lang="en-US"/>
           </a:p>
@@ -5136,9 +5074,149 @@
       </p:ext>
     </p:extLst>
   </p:cSld>
-  <p:clrMapOvr>
-    <a:masterClrMapping/>
-  </p:clrMapOvr>
+</p:sld>
+</file>
+
+<file path=ppt/slides/slide9.xml><?xml version="1.0" encoding="utf-8"?>
+<p:sld xmlns:a="http://schemas.openxmlformats.org/drawingml/2006/main" xmlns:p="http://schemas.openxmlformats.org/presentationml/2006/main" xmlns:r="http://schemas.openxmlformats.org/officeDocument/2006/relationships">
+  <p:cSld name="">
+    <p:spTree>
+      <p:nvGrpSpPr>
+        <p:cNvPr id="1" name=""/>
+        <p:cNvGrpSpPr/>
+        <p:nvPr/>
+      </p:nvGrpSpPr>
+      <p:grpSpPr>
+        <a:xfrm>
+          <a:off x="0" y="0"/>
+          <a:ext cx="0" cy="0"/>
+          <a:chOff x="0" y="0"/>
+          <a:chExt cx="0" cy="0"/>
+        </a:xfrm>
+      </p:grpSpPr>
+      <p:sp>
+        <p:nvSpPr>
+          <p:cNvPr id="2" name="Title"/>
+          <p:cNvSpPr>
+            <a:spLocks noGrp="1"/>
+          </p:cNvSpPr>
+          <p:nvPr>
+            <p:ph type="title"/>
+          </p:nvPr>
+        </p:nvSpPr>
+        <p:spPr/>
+        <p:txBody>
+          <a:bodyPr/>
+          <a:lstStyle/>
+          <a:p>
+            <a:r>
+              <a:t>Channel Comparison - BlueBrain PVBC KDB</a:t>
+            </a:r>
+          </a:p>
+        </p:txBody>
+      </p:sp>
+      <p:pic>
+        <p:nvPicPr>
+          <p:cNvPr id="3" name="Content"/>
+          <p:cNvPicPr>
+            <a:picLocks noChangeAspect="1" noGrp="1"/>
+          </p:cNvPicPr>
+          <p:nvPr>
+            <p:ph idx="1"/>
+          </p:nvPr>
+        </p:nvPicPr>
+        <p:blipFill>
+          <a:blip r:embed="rId2">
+            <a:extLst>
+              <a:ext uri="{28A0092B-C50C-407E-A947-70E740481C1C}">
+                <a14:useLocalDpi xmlns:a14="http://schemas.microsoft.com/office/drawing/2010/main" val="0"/>
+              </a:ext>
+            </a:extLst>
+          </a:blip>
+          <a:stretch>
+            <a:fillRect/>
+          </a:stretch>
+        </p:blipFill>
+        <p:spPr>
+          <a:xfrm>
+            <a:off x="2513757" y="1825625"/>
+            <a:ext cx="7164484" cy="4351338"/>
+          </a:xfrm>
+          <a:prstGeom prst="rect"/>
+        </p:spPr>
+      </p:pic>
+      <p:sp>
+        <p:nvSpPr>
+          <p:cNvPr id="4" name="Date"/>
+          <p:cNvSpPr>
+            <a:spLocks noGrp="1"/>
+          </p:cNvSpPr>
+          <p:nvPr>
+            <p:ph idx="10" sz="half" type="dt"/>
+          </p:nvPr>
+        </p:nvSpPr>
+        <p:spPr/>
+        <p:txBody>
+          <a:bodyPr/>
+          <a:lstStyle/>
+          <a:p>
+            <a:fld id="{5C2C3F0B-2B7F-4782-B315-33E516447C25}" type="datetimeFigureOut">
+              <a:rPr lang="en-US" smtClean="0"/>
+              <a:t>3/21/2019</a:t>
+            </a:fld>
+            <a:endParaRPr lang="en-US"/>
+          </a:p>
+        </p:txBody>
+      </p:sp>
+      <p:sp>
+        <p:nvSpPr>
+          <p:cNvPr id="5" name="Footer"/>
+          <p:cNvSpPr>
+            <a:spLocks noGrp="1"/>
+          </p:cNvSpPr>
+          <p:nvPr>
+            <p:ph idx="11" sz="quarter" type="ftr"/>
+          </p:nvPr>
+        </p:nvSpPr>
+        <p:spPr/>
+        <p:txBody>
+          <a:bodyPr/>
+          <a:lstStyle/>
+          <a:p>
+            <a:endParaRPr lang="en-US"/>
+          </a:p>
+        </p:txBody>
+      </p:sp>
+      <p:sp>
+        <p:nvSpPr>
+          <p:cNvPr id="6" name="Slide Number"/>
+          <p:cNvSpPr>
+            <a:spLocks noGrp="1"/>
+          </p:cNvSpPr>
+          <p:nvPr>
+            <p:ph idx="12" sz="quarter" type="sldNum"/>
+          </p:nvPr>
+        </p:nvSpPr>
+        <p:spPr/>
+        <p:txBody>
+          <a:bodyPr/>
+          <a:lstStyle/>
+          <a:p>
+            <a:fld id="{6FACB95C-998B-4B89-BDB5-3B69D78FCBB4}" type="slidenum">
+              <a:rPr lang="en-US" smtClean="0"/>
+              <a:t>‹#›</a:t>
+            </a:fld>
+            <a:endParaRPr lang="en-US"/>
+          </a:p>
+        </p:txBody>
+      </p:sp>
+    </p:spTree>
+    <p:extLst>
+      <p:ext uri="{BB962C8B-B14F-4D97-AF65-F5344CB8AC3E}">
+        <p14:creationId xmlns:p14="http://schemas.microsoft.com/office/powerpoint/2010/main" val="1534215338"/>
+      </p:ext>
+    </p:extLst>
+  </p:cSld>
 </p:sld>
 </file>
 
